--- a/ikev2/docs/output/IKEv2_LoadBalancer_Report.pptx
+++ b/ikev2/docs/output/IKEv2_LoadBalancer_Report.pptx
@@ -1965,7 +1965,7 @@
             </a:pPr>
             <a:r>
               <a:rPr lang="en-US" sz="2000"/>
-              <a:t>Unit tests: 30/30 PASS</a:t>
+              <a:t>Unit tests: 31/31 PASS</a:t>
             </a:r>
           </a:p>
           <a:p>
@@ -1986,7 +1986,7 @@
             <a:pPr lvl="0"/>
             <a:r>
               <a:rPr lang="en-US" sz="2000"/>
-              <a:t>Manual: StrongSwan + openiked S-01–S-04</a:t>
+              <a:t>S-01 automated PASS (StrongSwan); S-02–S-04 partial/manual</a:t>
             </a:r>
           </a:p>
         </p:txBody>
@@ -2269,7 +2269,7 @@
             <a:pPr lvl="0"/>
             <a:r>
               <a:rPr lang="en-US" sz="2000"/>
-              <a:t>Manual S-01–S-04 before go-live</a:t>
+              <a:t>S-04 NAT-T (10.10.x) before full go-live</a:t>
             </a:r>
           </a:p>
           <a:p>
